--- a/examples/sample-master.pptx
+++ b/examples/sample-master.pptx
@@ -4,7 +4,8 @@
   <p:sldMasterIdLst>
     <p:sldMasterId id="2147483648" r:id="rId1"/>
   </p:sldMasterIdLst>
-  <p:sldSz cx="12191695" cy="6858000" type="screen4x3"/>
+  <p:sldIdLst/>
+  <p:sldSz cx="12192000" cy="6858000" type="screen4x3"/>
   <p:notesSz cx="6858000" cy="9144000"/>
   <p:defaultTextStyle>
     <a:defPPr>
@@ -133,8 +134,8 @@
         </p:nvSpPr>
         <p:spPr>
           <a:xfrm>
-            <a:off x="685800" y="2130425"/>
-            <a:ext cx="7772400" cy="1470025"/>
+            <a:off x="1524000" y="1122363"/>
+            <a:ext cx="9144000" cy="2387600"/>
           </a:xfrm>
         </p:spPr>
         <p:txBody>
@@ -161,8 +162,8 @@
         </p:nvSpPr>
         <p:spPr>
           <a:xfrm>
-            <a:off x="1371600" y="3886200"/>
-            <a:ext cx="6400800" cy="1752600"/>
+            <a:off x="1524000" y="3602038"/>
+            <a:ext cx="9144000" cy="1655762"/>
           </a:xfrm>
         </p:spPr>
         <p:txBody>
@@ -346,356 +347,6 @@
 </p:sldLayout>
 </file>
 
-<file path=ppt/slideLayouts/slideLayout10.xml><?xml version="1.0" encoding="utf-8"?>
-<p:sldLayout xmlns:a="http://schemas.openxmlformats.org/drawingml/2006/main" xmlns:r="http://schemas.openxmlformats.org/officeDocument/2006/relationships" xmlns:p="http://schemas.openxmlformats.org/presentationml/2006/main" type="vertTx" preserve="1">
-  <p:cSld name="Title and Vertical Text">
-    <p:spTree>
-      <p:nvGrpSpPr>
-        <p:cNvPr id="1" name=""/>
-        <p:cNvGrpSpPr/>
-        <p:nvPr/>
-      </p:nvGrpSpPr>
-      <p:grpSpPr>
-        <a:xfrm>
-          <a:off x="0" y="0"/>
-          <a:ext cx="0" cy="0"/>
-          <a:chOff x="0" y="0"/>
-          <a:chExt cx="0" cy="0"/>
-        </a:xfrm>
-      </p:grpSpPr>
-      <p:sp>
-        <p:nvSpPr>
-          <p:cNvPr id="2" name="Title 1"/>
-          <p:cNvSpPr>
-            <a:spLocks noGrp="1"/>
-          </p:cNvSpPr>
-          <p:nvPr>
-            <p:ph type="title"/>
-          </p:nvPr>
-        </p:nvSpPr>
-        <p:spPr/>
-        <p:txBody>
-          <a:bodyPr/>
-          <a:lstStyle/>
-          <a:p>
-            <a:r>
-              <a:rPr lang="en-US" smtClean="0"/>
-              <a:t>Click to edit Master title style</a:t>
-            </a:r>
-            <a:endParaRPr lang="en-US"/>
-          </a:p>
-        </p:txBody>
-      </p:sp>
-      <p:sp>
-        <p:nvSpPr>
-          <p:cNvPr id="3" name="Vertical Text Placeholder 2"/>
-          <p:cNvSpPr>
-            <a:spLocks noGrp="1"/>
-          </p:cNvSpPr>
-          <p:nvPr>
-            <p:ph type="body" orient="vert" idx="1"/>
-          </p:nvPr>
-        </p:nvSpPr>
-        <p:spPr/>
-        <p:txBody>
-          <a:bodyPr vert="eaVert"/>
-          <a:lstStyle/>
-          <a:p>
-            <a:pPr lvl="0"/>
-            <a:r>
-              <a:rPr lang="en-US" smtClean="0"/>
-              <a:t>Click to edit Master text styles</a:t>
-            </a:r>
-          </a:p>
-          <a:p>
-            <a:pPr lvl="1"/>
-            <a:r>
-              <a:rPr lang="en-US" smtClean="0"/>
-              <a:t>Second level</a:t>
-            </a:r>
-          </a:p>
-          <a:p>
-            <a:pPr lvl="2"/>
-            <a:r>
-              <a:rPr lang="en-US" smtClean="0"/>
-              <a:t>Third level</a:t>
-            </a:r>
-          </a:p>
-          <a:p>
-            <a:pPr lvl="3"/>
-            <a:r>
-              <a:rPr lang="en-US" smtClean="0"/>
-              <a:t>Fourth level</a:t>
-            </a:r>
-          </a:p>
-          <a:p>
-            <a:pPr lvl="4"/>
-            <a:r>
-              <a:rPr lang="en-US" smtClean="0"/>
-              <a:t>Fifth level</a:t>
-            </a:r>
-            <a:endParaRPr lang="en-US"/>
-          </a:p>
-        </p:txBody>
-      </p:sp>
-      <p:sp>
-        <p:nvSpPr>
-          <p:cNvPr id="4" name="Date Placeholder 3"/>
-          <p:cNvSpPr>
-            <a:spLocks noGrp="1"/>
-          </p:cNvSpPr>
-          <p:nvPr>
-            <p:ph type="dt" sz="half" idx="10"/>
-          </p:nvPr>
-        </p:nvSpPr>
-        <p:spPr/>
-        <p:txBody>
-          <a:bodyPr/>
-          <a:lstStyle/>
-          <a:p>
-            <a:fld id="{5BCAD085-E8A6-8845-BD4E-CB4CCA059FC4}" type="datetimeFigureOut">
-              <a:rPr lang="en-US" smtClean="0"/>
-              <a:t>1/27/13</a:t>
-            </a:fld>
-            <a:endParaRPr lang="en-US"/>
-          </a:p>
-        </p:txBody>
-      </p:sp>
-      <p:sp>
-        <p:nvSpPr>
-          <p:cNvPr id="5" name="Footer Placeholder 4"/>
-          <p:cNvSpPr>
-            <a:spLocks noGrp="1"/>
-          </p:cNvSpPr>
-          <p:nvPr>
-            <p:ph type="ftr" sz="quarter" idx="11"/>
-          </p:nvPr>
-        </p:nvSpPr>
-        <p:spPr/>
-        <p:txBody>
-          <a:bodyPr/>
-          <a:lstStyle/>
-          <a:p>
-            <a:endParaRPr lang="en-US"/>
-          </a:p>
-        </p:txBody>
-      </p:sp>
-      <p:sp>
-        <p:nvSpPr>
-          <p:cNvPr id="6" name="Slide Number Placeholder 5"/>
-          <p:cNvSpPr>
-            <a:spLocks noGrp="1"/>
-          </p:cNvSpPr>
-          <p:nvPr>
-            <p:ph type="sldNum" sz="quarter" idx="12"/>
-          </p:nvPr>
-        </p:nvSpPr>
-        <p:spPr/>
-        <p:txBody>
-          <a:bodyPr/>
-          <a:lstStyle/>
-          <a:p>
-            <a:fld id="{C1FF6DA9-008F-8B48-92A6-B652298478BF}" type="slidenum">
-              <a:rPr lang="en-US" smtClean="0"/>
-              <a:t>‹#›</a:t>
-            </a:fld>
-            <a:endParaRPr lang="en-US"/>
-          </a:p>
-        </p:txBody>
-      </p:sp>
-    </p:spTree>
-    <p:extLst>
-      <p:ext uri="{BB962C8B-B14F-4D97-AF65-F5344CB8AC3E}">
-        <p14:creationId xmlns:p14="http://schemas.microsoft.com/office/powerpoint/2010/main" val="2910927964"/>
-      </p:ext>
-    </p:extLst>
-  </p:cSld>
-  <p:clrMapOvr>
-    <a:masterClrMapping/>
-  </p:clrMapOvr>
-</p:sldLayout>
-</file>
-
-<file path=ppt/slideLayouts/slideLayout11.xml><?xml version="1.0" encoding="utf-8"?>
-<p:sldLayout xmlns:a="http://schemas.openxmlformats.org/drawingml/2006/main" xmlns:r="http://schemas.openxmlformats.org/officeDocument/2006/relationships" xmlns:p="http://schemas.openxmlformats.org/presentationml/2006/main" type="vertTitleAndTx" preserve="1">
-  <p:cSld name="Vertical Title and Text">
-    <p:spTree>
-      <p:nvGrpSpPr>
-        <p:cNvPr id="1" name=""/>
-        <p:cNvGrpSpPr/>
-        <p:nvPr/>
-      </p:nvGrpSpPr>
-      <p:grpSpPr>
-        <a:xfrm>
-          <a:off x="0" y="0"/>
-          <a:ext cx="0" cy="0"/>
-          <a:chOff x="0" y="0"/>
-          <a:chExt cx="0" cy="0"/>
-        </a:xfrm>
-      </p:grpSpPr>
-      <p:sp>
-        <p:nvSpPr>
-          <p:cNvPr id="2" name="Vertical Title 1"/>
-          <p:cNvSpPr>
-            <a:spLocks noGrp="1"/>
-          </p:cNvSpPr>
-          <p:nvPr>
-            <p:ph type="title" orient="vert"/>
-          </p:nvPr>
-        </p:nvSpPr>
-        <p:spPr>
-          <a:xfrm>
-            <a:off x="6629400" y="274638"/>
-            <a:ext cx="2057400" cy="5851525"/>
-          </a:xfrm>
-        </p:spPr>
-        <p:txBody>
-          <a:bodyPr vert="eaVert"/>
-          <a:lstStyle/>
-          <a:p>
-            <a:r>
-              <a:rPr lang="en-US" smtClean="0"/>
-              <a:t>Click to edit Master title style</a:t>
-            </a:r>
-            <a:endParaRPr lang="en-US"/>
-          </a:p>
-        </p:txBody>
-      </p:sp>
-      <p:sp>
-        <p:nvSpPr>
-          <p:cNvPr id="3" name="Vertical Text Placeholder 2"/>
-          <p:cNvSpPr>
-            <a:spLocks noGrp="1"/>
-          </p:cNvSpPr>
-          <p:nvPr>
-            <p:ph type="body" orient="vert" idx="1"/>
-          </p:nvPr>
-        </p:nvSpPr>
-        <p:spPr>
-          <a:xfrm>
-            <a:off x="457200" y="274638"/>
-            <a:ext cx="6019800" cy="5851525"/>
-          </a:xfrm>
-        </p:spPr>
-        <p:txBody>
-          <a:bodyPr vert="eaVert"/>
-          <a:lstStyle/>
-          <a:p>
-            <a:pPr lvl="0"/>
-            <a:r>
-              <a:rPr lang="en-US" smtClean="0"/>
-              <a:t>Click to edit Master text styles</a:t>
-            </a:r>
-          </a:p>
-          <a:p>
-            <a:pPr lvl="1"/>
-            <a:r>
-              <a:rPr lang="en-US" smtClean="0"/>
-              <a:t>Second level</a:t>
-            </a:r>
-          </a:p>
-          <a:p>
-            <a:pPr lvl="2"/>
-            <a:r>
-              <a:rPr lang="en-US" smtClean="0"/>
-              <a:t>Third level</a:t>
-            </a:r>
-          </a:p>
-          <a:p>
-            <a:pPr lvl="3"/>
-            <a:r>
-              <a:rPr lang="en-US" smtClean="0"/>
-              <a:t>Fourth level</a:t>
-            </a:r>
-          </a:p>
-          <a:p>
-            <a:pPr lvl="4"/>
-            <a:r>
-              <a:rPr lang="en-US" smtClean="0"/>
-              <a:t>Fifth level</a:t>
-            </a:r>
-            <a:endParaRPr lang="en-US"/>
-          </a:p>
-        </p:txBody>
-      </p:sp>
-      <p:sp>
-        <p:nvSpPr>
-          <p:cNvPr id="4" name="Date Placeholder 3"/>
-          <p:cNvSpPr>
-            <a:spLocks noGrp="1"/>
-          </p:cNvSpPr>
-          <p:nvPr>
-            <p:ph type="dt" sz="half" idx="10"/>
-          </p:nvPr>
-        </p:nvSpPr>
-        <p:spPr/>
-        <p:txBody>
-          <a:bodyPr/>
-          <a:lstStyle/>
-          <a:p>
-            <a:fld id="{5BCAD085-E8A6-8845-BD4E-CB4CCA059FC4}" type="datetimeFigureOut">
-              <a:rPr lang="en-US" smtClean="0"/>
-              <a:t>1/27/13</a:t>
-            </a:fld>
-            <a:endParaRPr lang="en-US"/>
-          </a:p>
-        </p:txBody>
-      </p:sp>
-      <p:sp>
-        <p:nvSpPr>
-          <p:cNvPr id="5" name="Footer Placeholder 4"/>
-          <p:cNvSpPr>
-            <a:spLocks noGrp="1"/>
-          </p:cNvSpPr>
-          <p:nvPr>
-            <p:ph type="ftr" sz="quarter" idx="11"/>
-          </p:nvPr>
-        </p:nvSpPr>
-        <p:spPr/>
-        <p:txBody>
-          <a:bodyPr/>
-          <a:lstStyle/>
-          <a:p>
-            <a:endParaRPr lang="en-US"/>
-          </a:p>
-        </p:txBody>
-      </p:sp>
-      <p:sp>
-        <p:nvSpPr>
-          <p:cNvPr id="6" name="Slide Number Placeholder 5"/>
-          <p:cNvSpPr>
-            <a:spLocks noGrp="1"/>
-          </p:cNvSpPr>
-          <p:nvPr>
-            <p:ph type="sldNum" sz="quarter" idx="12"/>
-          </p:nvPr>
-        </p:nvSpPr>
-        <p:spPr/>
-        <p:txBody>
-          <a:bodyPr/>
-          <a:lstStyle/>
-          <a:p>
-            <a:fld id="{C1FF6DA9-008F-8B48-92A6-B652298478BF}" type="slidenum">
-              <a:rPr lang="en-US" smtClean="0"/>
-              <a:t>‹#›</a:t>
-            </a:fld>
-            <a:endParaRPr lang="en-US"/>
-          </a:p>
-        </p:txBody>
-      </p:sp>
-    </p:spTree>
-    <p:extLst>
-      <p:ext uri="{BB962C8B-B14F-4D97-AF65-F5344CB8AC3E}">
-        <p14:creationId xmlns:p14="http://schemas.microsoft.com/office/powerpoint/2010/main" val="3612223792"/>
-      </p:ext>
-    </p:extLst>
-  </p:cSld>
-  <p:clrMapOvr>
-    <a:masterClrMapping/>
-  </p:clrMapOvr>
-</p:sldLayout>
-</file>
-
 <file path=ppt/slideLayouts/slideLayout2.xml><?xml version="1.0" encoding="utf-8"?>
 <p:sldLayout xmlns:a="http://schemas.openxmlformats.org/drawingml/2006/main" xmlns:r="http://schemas.openxmlformats.org/officeDocument/2006/relationships" xmlns:p="http://schemas.openxmlformats.org/presentationml/2006/main" type="obj" preserve="1">
   <p:cSld name="Body-Text">
@@ -895,8 +546,8 @@
         </p:nvSpPr>
         <p:spPr>
           <a:xfrm>
-            <a:off x="722313" y="4406900"/>
-            <a:ext cx="7772400" cy="1362075"/>
+            <a:off x="831850" y="1709738"/>
+            <a:ext cx="10515600" cy="2852737"/>
           </a:xfrm>
         </p:spPr>
         <p:txBody>
@@ -927,8 +578,8 @@
         </p:nvSpPr>
         <p:spPr>
           <a:xfrm>
-            <a:off x="722313" y="2906713"/>
-            <a:ext cx="7772400" cy="1500187"/>
+            <a:off x="831850" y="4589463"/>
+            <a:ext cx="10515600" cy="1500187"/>
           </a:xfrm>
         </p:spPr>
         <p:txBody>
@@ -1164,8 +815,8 @@
         </p:nvSpPr>
         <p:spPr>
           <a:xfrm>
-            <a:off x="457200" y="1600200"/>
-            <a:ext cx="4038600" cy="4525963"/>
+            <a:off x="838200" y="1825625"/>
+            <a:ext cx="5181600" cy="4351338"/>
           </a:xfrm>
         </p:spPr>
         <p:txBody>
@@ -1249,8 +900,8 @@
         </p:nvSpPr>
         <p:spPr>
           <a:xfrm>
-            <a:off x="4648200" y="1600200"/>
-            <a:ext cx="4038600" cy="4525963"/>
+            <a:off x="6172200" y="1825625"/>
+            <a:ext cx="5181600" cy="4351338"/>
           </a:xfrm>
         </p:spPr>
         <p:txBody>
@@ -1400,9 +1051,9 @@
 </p:sldLayout>
 </file>
 
-<file path=ppt/slideLayouts/slideLayout5.xml><?xml version="1.0" encoding="utf-8"?>
-<p:sldLayout xmlns:a="http://schemas.openxmlformats.org/drawingml/2006/main" xmlns:r="http://schemas.openxmlformats.org/officeDocument/2006/relationships" xmlns:p="http://schemas.openxmlformats.org/presentationml/2006/main" type="twoTxTwoObj" preserve="1">
-  <p:cSld name="Comparison">
+<file path=ppt/slideLayouts/slideLayout6.xml><?xml version="1.0" encoding="utf-8"?>
+<p:sldLayout xmlns:a="http://schemas.openxmlformats.org/drawingml/2006/main" xmlns:r="http://schemas.openxmlformats.org/officeDocument/2006/relationships" xmlns:p="http://schemas.openxmlformats.org/presentationml/2006/main" type="titleOnly" preserve="1">
+  <p:cSld name="Agenda">
     <p:spTree>
       <p:nvGrpSpPr>
         <p:cNvPr id="1" name=""/>
@@ -1430,11 +1081,7 @@
         <p:spPr/>
         <p:txBody>
           <a:bodyPr/>
-          <a:lstStyle>
-            <a:lvl1pPr>
-              <a:defRPr/>
-            </a:lvl1pPr>
-          </a:lstStyle>
+          <a:lstStyle/>
           <a:p>
             <a:r>
               <a:rPr lang="en-US" smtClean="0"/>
@@ -1446,60 +1093,18 @@
       </p:sp>
       <p:sp>
         <p:nvSpPr>
-          <p:cNvPr id="3" name="Text Placeholder 2"/>
-          <p:cNvSpPr>
-            <a:spLocks noGrp="1"/>
-          </p:cNvSpPr>
-          <p:nvPr>
-            <p:ph type="body" idx="1"/>
-          </p:nvPr>
-        </p:nvSpPr>
-        <p:spPr>
-          <a:xfrm>
-            <a:off x="457200" y="1535113"/>
-            <a:ext cx="4040188" cy="639762"/>
-          </a:xfrm>
-        </p:spPr>
-        <p:txBody>
-          <a:bodyPr anchor="b"/>
-          <a:lstStyle>
-            <a:lvl1pPr marL="0" indent="0">
-              <a:buNone/>
-              <a:defRPr sz="2400" b="1"/>
-            </a:lvl1pPr>
-            <a:lvl2pPr marL="457200" indent="0">
-              <a:buNone/>
-              <a:defRPr sz="2000" b="1"/>
-            </a:lvl2pPr>
-            <a:lvl3pPr marL="914400" indent="0">
-              <a:buNone/>
-              <a:defRPr sz="1800" b="1"/>
-            </a:lvl3pPr>
-            <a:lvl4pPr marL="1371600" indent="0">
-              <a:buNone/>
-              <a:defRPr sz="1600" b="1"/>
-            </a:lvl4pPr>
-            <a:lvl5pPr marL="1828800" indent="0">
-              <a:buNone/>
-              <a:defRPr sz="1600" b="1"/>
-            </a:lvl5pPr>
-            <a:lvl6pPr marL="2286000" indent="0">
-              <a:buNone/>
-              <a:defRPr sz="1600" b="1"/>
-            </a:lvl6pPr>
-            <a:lvl7pPr marL="2743200" indent="0">
-              <a:buNone/>
-              <a:defRPr sz="1600" b="1"/>
-            </a:lvl7pPr>
-            <a:lvl8pPr marL="3200400" indent="0">
-              <a:buNone/>
-              <a:defRPr sz="1600" b="1"/>
-            </a:lvl8pPr>
-            <a:lvl9pPr marL="3657600" indent="0">
-              <a:buNone/>
-              <a:defRPr sz="1600" b="1"/>
-            </a:lvl9pPr>
-          </a:lstStyle>
+          <p:cNvPr id="6" name="Content Placeholder 2"/>
+          <p:cNvSpPr>
+            <a:spLocks noGrp="1"/>
+          </p:cNvSpPr>
+          <p:nvPr>
+            <p:ph idx="1"/>
+          </p:nvPr>
+        </p:nvSpPr>
+        <p:spPr/>
+        <p:txBody>
+          <a:bodyPr/>
+          <a:lstStyle/>
           <a:p>
             <a:pPr lvl="0"/>
             <a:r>
@@ -1507,62 +1112,6 @@
               <a:t>Click to edit Master text styles</a:t>
             </a:r>
           </a:p>
-        </p:txBody>
-      </p:sp>
-      <p:sp>
-        <p:nvSpPr>
-          <p:cNvPr id="4" name="Content Placeholder 3"/>
-          <p:cNvSpPr>
-            <a:spLocks noGrp="1"/>
-          </p:cNvSpPr>
-          <p:nvPr>
-            <p:ph sz="half" idx="2"/>
-          </p:nvPr>
-        </p:nvSpPr>
-        <p:spPr>
-          <a:xfrm>
-            <a:off x="457200" y="2174875"/>
-            <a:ext cx="4040188" cy="3951288"/>
-          </a:xfrm>
-        </p:spPr>
-        <p:txBody>
-          <a:bodyPr/>
-          <a:lstStyle>
-            <a:lvl1pPr>
-              <a:defRPr sz="2400"/>
-            </a:lvl1pPr>
-            <a:lvl2pPr>
-              <a:defRPr sz="2000"/>
-            </a:lvl2pPr>
-            <a:lvl3pPr>
-              <a:defRPr sz="1800"/>
-            </a:lvl3pPr>
-            <a:lvl4pPr>
-              <a:defRPr sz="1600"/>
-            </a:lvl4pPr>
-            <a:lvl5pPr>
-              <a:defRPr sz="1600"/>
-            </a:lvl5pPr>
-            <a:lvl6pPr>
-              <a:defRPr sz="1600"/>
-            </a:lvl6pPr>
-            <a:lvl7pPr>
-              <a:defRPr sz="1600"/>
-            </a:lvl7pPr>
-            <a:lvl8pPr>
-              <a:defRPr sz="1600"/>
-            </a:lvl8pPr>
-            <a:lvl9pPr>
-              <a:defRPr sz="1600"/>
-            </a:lvl9pPr>
-          </a:lstStyle>
-          <a:p>
-            <a:pPr lvl="0"/>
-            <a:r>
-              <a:rPr lang="en-US" smtClean="0"/>
-              <a:t>Click to edit Master text styles</a:t>
-            </a:r>
-          </a:p>
           <a:p>
             <a:pPr lvl="1"/>
             <a:r>
@@ -1589,274 +1138,6 @@
             <a:r>
               <a:rPr lang="en-US" smtClean="0"/>
               <a:t>Fifth level</a:t>
-            </a:r>
-            <a:endParaRPr lang="en-US"/>
-          </a:p>
-        </p:txBody>
-      </p:sp>
-      <p:sp>
-        <p:nvSpPr>
-          <p:cNvPr id="5" name="Text Placeholder 4"/>
-          <p:cNvSpPr>
-            <a:spLocks noGrp="1"/>
-          </p:cNvSpPr>
-          <p:nvPr>
-            <p:ph type="body" sz="quarter" idx="3"/>
-          </p:nvPr>
-        </p:nvSpPr>
-        <p:spPr>
-          <a:xfrm>
-            <a:off x="4645025" y="1535113"/>
-            <a:ext cx="4041775" cy="639762"/>
-          </a:xfrm>
-        </p:spPr>
-        <p:txBody>
-          <a:bodyPr anchor="b"/>
-          <a:lstStyle>
-            <a:lvl1pPr marL="0" indent="0">
-              <a:buNone/>
-              <a:defRPr sz="2400" b="1"/>
-            </a:lvl1pPr>
-            <a:lvl2pPr marL="457200" indent="0">
-              <a:buNone/>
-              <a:defRPr sz="2000" b="1"/>
-            </a:lvl2pPr>
-            <a:lvl3pPr marL="914400" indent="0">
-              <a:buNone/>
-              <a:defRPr sz="1800" b="1"/>
-            </a:lvl3pPr>
-            <a:lvl4pPr marL="1371600" indent="0">
-              <a:buNone/>
-              <a:defRPr sz="1600" b="1"/>
-            </a:lvl4pPr>
-            <a:lvl5pPr marL="1828800" indent="0">
-              <a:buNone/>
-              <a:defRPr sz="1600" b="1"/>
-            </a:lvl5pPr>
-            <a:lvl6pPr marL="2286000" indent="0">
-              <a:buNone/>
-              <a:defRPr sz="1600" b="1"/>
-            </a:lvl6pPr>
-            <a:lvl7pPr marL="2743200" indent="0">
-              <a:buNone/>
-              <a:defRPr sz="1600" b="1"/>
-            </a:lvl7pPr>
-            <a:lvl8pPr marL="3200400" indent="0">
-              <a:buNone/>
-              <a:defRPr sz="1600" b="1"/>
-            </a:lvl8pPr>
-            <a:lvl9pPr marL="3657600" indent="0">
-              <a:buNone/>
-              <a:defRPr sz="1600" b="1"/>
-            </a:lvl9pPr>
-          </a:lstStyle>
-          <a:p>
-            <a:pPr lvl="0"/>
-            <a:r>
-              <a:rPr lang="en-US" smtClean="0"/>
-              <a:t>Click to edit Master text styles</a:t>
-            </a:r>
-          </a:p>
-        </p:txBody>
-      </p:sp>
-      <p:sp>
-        <p:nvSpPr>
-          <p:cNvPr id="6" name="Content Placeholder 5"/>
-          <p:cNvSpPr>
-            <a:spLocks noGrp="1"/>
-          </p:cNvSpPr>
-          <p:nvPr>
-            <p:ph sz="quarter" idx="4"/>
-          </p:nvPr>
-        </p:nvSpPr>
-        <p:spPr>
-          <a:xfrm>
-            <a:off x="4645025" y="2174875"/>
-            <a:ext cx="4041775" cy="3951288"/>
-          </a:xfrm>
-        </p:spPr>
-        <p:txBody>
-          <a:bodyPr/>
-          <a:lstStyle>
-            <a:lvl1pPr>
-              <a:defRPr sz="2400"/>
-            </a:lvl1pPr>
-            <a:lvl2pPr>
-              <a:defRPr sz="2000"/>
-            </a:lvl2pPr>
-            <a:lvl3pPr>
-              <a:defRPr sz="1800"/>
-            </a:lvl3pPr>
-            <a:lvl4pPr>
-              <a:defRPr sz="1600"/>
-            </a:lvl4pPr>
-            <a:lvl5pPr>
-              <a:defRPr sz="1600"/>
-            </a:lvl5pPr>
-            <a:lvl6pPr>
-              <a:defRPr sz="1600"/>
-            </a:lvl6pPr>
-            <a:lvl7pPr>
-              <a:defRPr sz="1600"/>
-            </a:lvl7pPr>
-            <a:lvl8pPr>
-              <a:defRPr sz="1600"/>
-            </a:lvl8pPr>
-            <a:lvl9pPr>
-              <a:defRPr sz="1600"/>
-            </a:lvl9pPr>
-          </a:lstStyle>
-          <a:p>
-            <a:pPr lvl="0"/>
-            <a:r>
-              <a:rPr lang="en-US" smtClean="0"/>
-              <a:t>Click to edit Master text styles</a:t>
-            </a:r>
-          </a:p>
-          <a:p>
-            <a:pPr lvl="1"/>
-            <a:r>
-              <a:rPr lang="en-US" smtClean="0"/>
-              <a:t>Second level</a:t>
-            </a:r>
-          </a:p>
-          <a:p>
-            <a:pPr lvl="2"/>
-            <a:r>
-              <a:rPr lang="en-US" smtClean="0"/>
-              <a:t>Third level</a:t>
-            </a:r>
-          </a:p>
-          <a:p>
-            <a:pPr lvl="3"/>
-            <a:r>
-              <a:rPr lang="en-US" smtClean="0"/>
-              <a:t>Fourth level</a:t>
-            </a:r>
-          </a:p>
-          <a:p>
-            <a:pPr lvl="4"/>
-            <a:r>
-              <a:rPr lang="en-US" smtClean="0"/>
-              <a:t>Fifth level</a:t>
-            </a:r>
-            <a:endParaRPr lang="en-US"/>
-          </a:p>
-        </p:txBody>
-      </p:sp>
-      <p:sp>
-        <p:nvSpPr>
-          <p:cNvPr id="7" name="Date Placeholder 6"/>
-          <p:cNvSpPr>
-            <a:spLocks noGrp="1"/>
-          </p:cNvSpPr>
-          <p:nvPr>
-            <p:ph type="dt" sz="half" idx="10"/>
-          </p:nvPr>
-        </p:nvSpPr>
-        <p:spPr/>
-        <p:txBody>
-          <a:bodyPr/>
-          <a:lstStyle/>
-          <a:p>
-            <a:fld id="{5BCAD085-E8A6-8845-BD4E-CB4CCA059FC4}" type="datetimeFigureOut">
-              <a:rPr lang="en-US" smtClean="0"/>
-              <a:t>1/27/13</a:t>
-            </a:fld>
-            <a:endParaRPr lang="en-US"/>
-          </a:p>
-        </p:txBody>
-      </p:sp>
-      <p:sp>
-        <p:nvSpPr>
-          <p:cNvPr id="8" name="Footer Placeholder 7"/>
-          <p:cNvSpPr>
-            <a:spLocks noGrp="1"/>
-          </p:cNvSpPr>
-          <p:nvPr>
-            <p:ph type="ftr" sz="quarter" idx="11"/>
-          </p:nvPr>
-        </p:nvSpPr>
-        <p:spPr/>
-        <p:txBody>
-          <a:bodyPr/>
-          <a:lstStyle/>
-          <a:p>
-            <a:endParaRPr lang="en-US"/>
-          </a:p>
-        </p:txBody>
-      </p:sp>
-      <p:sp>
-        <p:nvSpPr>
-          <p:cNvPr id="9" name="Slide Number Placeholder 8"/>
-          <p:cNvSpPr>
-            <a:spLocks noGrp="1"/>
-          </p:cNvSpPr>
-          <p:nvPr>
-            <p:ph type="sldNum" sz="quarter" idx="12"/>
-          </p:nvPr>
-        </p:nvSpPr>
-        <p:spPr/>
-        <p:txBody>
-          <a:bodyPr/>
-          <a:lstStyle/>
-          <a:p>
-            <a:fld id="{C1FF6DA9-008F-8B48-92A6-B652298478BF}" type="slidenum">
-              <a:rPr lang="en-US" smtClean="0"/>
-              <a:t>‹#›</a:t>
-            </a:fld>
-            <a:endParaRPr lang="en-US"/>
-          </a:p>
-        </p:txBody>
-      </p:sp>
-    </p:spTree>
-    <p:extLst>
-      <p:ext uri="{BB962C8B-B14F-4D97-AF65-F5344CB8AC3E}">
-        <p14:creationId xmlns:p14="http://schemas.microsoft.com/office/powerpoint/2010/main" val="990158736"/>
-      </p:ext>
-    </p:extLst>
-  </p:cSld>
-  <p:clrMapOvr>
-    <a:masterClrMapping/>
-  </p:clrMapOvr>
-</p:sldLayout>
-</file>
-
-<file path=ppt/slideLayouts/slideLayout6.xml><?xml version="1.0" encoding="utf-8"?>
-<p:sldLayout xmlns:a="http://schemas.openxmlformats.org/drawingml/2006/main" xmlns:r="http://schemas.openxmlformats.org/officeDocument/2006/relationships" xmlns:p="http://schemas.openxmlformats.org/presentationml/2006/main" type="titleOnly" preserve="1">
-  <p:cSld name="Title Only">
-    <p:spTree>
-      <p:nvGrpSpPr>
-        <p:cNvPr id="1" name=""/>
-        <p:cNvGrpSpPr/>
-        <p:nvPr/>
-      </p:nvGrpSpPr>
-      <p:grpSpPr>
-        <a:xfrm>
-          <a:off x="0" y="0"/>
-          <a:ext cx="0" cy="0"/>
-          <a:chOff x="0" y="0"/>
-          <a:chExt cx="0" cy="0"/>
-        </a:xfrm>
-      </p:grpSpPr>
-      <p:sp>
-        <p:nvSpPr>
-          <p:cNvPr id="2" name="Title 1"/>
-          <p:cNvSpPr>
-            <a:spLocks noGrp="1"/>
-          </p:cNvSpPr>
-          <p:nvPr>
-            <p:ph type="title"/>
-          </p:nvPr>
-        </p:nvSpPr>
-        <p:spPr/>
-        <p:txBody>
-          <a:bodyPr/>
-          <a:lstStyle/>
-          <a:p>
-            <a:r>
-              <a:rPr lang="en-US" smtClean="0"/>
-              <a:t>Click to edit Master title style</a:t>
             </a:r>
             <a:endParaRPr lang="en-US"/>
           </a:p>
@@ -2026,536 +1307,6 @@
     <p:extLst>
       <p:ext uri="{BB962C8B-B14F-4D97-AF65-F5344CB8AC3E}">
         <p14:creationId xmlns:p14="http://schemas.microsoft.com/office/powerpoint/2010/main" val="1212999818"/>
-      </p:ext>
-    </p:extLst>
-  </p:cSld>
-  <p:clrMapOvr>
-    <a:masterClrMapping/>
-  </p:clrMapOvr>
-</p:sldLayout>
-</file>
-
-<file path=ppt/slideLayouts/slideLayout8.xml><?xml version="1.0" encoding="utf-8"?>
-<p:sldLayout xmlns:a="http://schemas.openxmlformats.org/drawingml/2006/main" xmlns:r="http://schemas.openxmlformats.org/officeDocument/2006/relationships" xmlns:p="http://schemas.openxmlformats.org/presentationml/2006/main" type="objTx" preserve="1">
-  <p:cSld name="Agenda">
-    <p:spTree>
-      <p:nvGrpSpPr>
-        <p:cNvPr id="1" name=""/>
-        <p:cNvGrpSpPr/>
-        <p:nvPr/>
-      </p:nvGrpSpPr>
-      <p:grpSpPr>
-        <a:xfrm>
-          <a:off x="0" y="0"/>
-          <a:ext cx="0" cy="0"/>
-          <a:chOff x="0" y="0"/>
-          <a:chExt cx="0" cy="0"/>
-        </a:xfrm>
-      </p:grpSpPr>
-      <p:sp>
-        <p:nvSpPr>
-          <p:cNvPr id="2" name="Title 1"/>
-          <p:cNvSpPr>
-            <a:spLocks noGrp="1"/>
-          </p:cNvSpPr>
-          <p:nvPr>
-            <p:ph type="title"/>
-          </p:nvPr>
-        </p:nvSpPr>
-        <p:spPr>
-          <a:xfrm>
-            <a:off x="457200" y="273050"/>
-            <a:ext cx="3008313" cy="1162050"/>
-          </a:xfrm>
-        </p:spPr>
-        <p:txBody>
-          <a:bodyPr anchor="b"/>
-          <a:lstStyle>
-            <a:lvl1pPr algn="l">
-              <a:defRPr sz="2000" b="1"/>
-            </a:lvl1pPr>
-          </a:lstStyle>
-          <a:p>
-            <a:r>
-              <a:rPr lang="en-US" smtClean="0"/>
-              <a:t>Click to edit Master title style</a:t>
-            </a:r>
-            <a:endParaRPr lang="en-US"/>
-          </a:p>
-        </p:txBody>
-      </p:sp>
-      <p:sp>
-        <p:nvSpPr>
-          <p:cNvPr id="3" name="Content Placeholder 2"/>
-          <p:cNvSpPr>
-            <a:spLocks noGrp="1"/>
-          </p:cNvSpPr>
-          <p:nvPr>
-            <p:ph idx="1"/>
-          </p:nvPr>
-        </p:nvSpPr>
-        <p:spPr>
-          <a:xfrm>
-            <a:off x="3575050" y="273050"/>
-            <a:ext cx="5111750" cy="5853113"/>
-          </a:xfrm>
-        </p:spPr>
-        <p:txBody>
-          <a:bodyPr/>
-          <a:lstStyle>
-            <a:lvl1pPr>
-              <a:defRPr sz="3200"/>
-            </a:lvl1pPr>
-            <a:lvl2pPr>
-              <a:defRPr sz="2800"/>
-            </a:lvl2pPr>
-            <a:lvl3pPr>
-              <a:defRPr sz="2400"/>
-            </a:lvl3pPr>
-            <a:lvl4pPr>
-              <a:defRPr sz="2000"/>
-            </a:lvl4pPr>
-            <a:lvl5pPr>
-              <a:defRPr sz="2000"/>
-            </a:lvl5pPr>
-            <a:lvl6pPr>
-              <a:defRPr sz="2000"/>
-            </a:lvl6pPr>
-            <a:lvl7pPr>
-              <a:defRPr sz="2000"/>
-            </a:lvl7pPr>
-            <a:lvl8pPr>
-              <a:defRPr sz="2000"/>
-            </a:lvl8pPr>
-            <a:lvl9pPr>
-              <a:defRPr sz="2000"/>
-            </a:lvl9pPr>
-          </a:lstStyle>
-          <a:p>
-            <a:pPr lvl="0"/>
-            <a:r>
-              <a:rPr lang="en-US" smtClean="0"/>
-              <a:t>Click to edit Master text styles</a:t>
-            </a:r>
-          </a:p>
-          <a:p>
-            <a:pPr lvl="1"/>
-            <a:r>
-              <a:rPr lang="en-US" smtClean="0"/>
-              <a:t>Second level</a:t>
-            </a:r>
-          </a:p>
-          <a:p>
-            <a:pPr lvl="2"/>
-            <a:r>
-              <a:rPr lang="en-US" smtClean="0"/>
-              <a:t>Third level</a:t>
-            </a:r>
-          </a:p>
-          <a:p>
-            <a:pPr lvl="3"/>
-            <a:r>
-              <a:rPr lang="en-US" smtClean="0"/>
-              <a:t>Fourth level</a:t>
-            </a:r>
-          </a:p>
-          <a:p>
-            <a:pPr lvl="4"/>
-            <a:r>
-              <a:rPr lang="en-US" smtClean="0"/>
-              <a:t>Fifth level</a:t>
-            </a:r>
-            <a:endParaRPr lang="en-US"/>
-          </a:p>
-        </p:txBody>
-      </p:sp>
-      <p:sp>
-        <p:nvSpPr>
-          <p:cNvPr id="4" name="Text Placeholder 3"/>
-          <p:cNvSpPr>
-            <a:spLocks noGrp="1"/>
-          </p:cNvSpPr>
-          <p:nvPr>
-            <p:ph type="body" sz="half" idx="2"/>
-          </p:nvPr>
-        </p:nvSpPr>
-        <p:spPr>
-          <a:xfrm>
-            <a:off x="457200" y="1435100"/>
-            <a:ext cx="3008313" cy="4691063"/>
-          </a:xfrm>
-        </p:spPr>
-        <p:txBody>
-          <a:bodyPr/>
-          <a:lstStyle>
-            <a:lvl1pPr marL="0" indent="0">
-              <a:buNone/>
-              <a:defRPr sz="1400"/>
-            </a:lvl1pPr>
-            <a:lvl2pPr marL="457200" indent="0">
-              <a:buNone/>
-              <a:defRPr sz="1200"/>
-            </a:lvl2pPr>
-            <a:lvl3pPr marL="914400" indent="0">
-              <a:buNone/>
-              <a:defRPr sz="1000"/>
-            </a:lvl3pPr>
-            <a:lvl4pPr marL="1371600" indent="0">
-              <a:buNone/>
-              <a:defRPr sz="900"/>
-            </a:lvl4pPr>
-            <a:lvl5pPr marL="1828800" indent="0">
-              <a:buNone/>
-              <a:defRPr sz="900"/>
-            </a:lvl5pPr>
-            <a:lvl6pPr marL="2286000" indent="0">
-              <a:buNone/>
-              <a:defRPr sz="900"/>
-            </a:lvl6pPr>
-            <a:lvl7pPr marL="2743200" indent="0">
-              <a:buNone/>
-              <a:defRPr sz="900"/>
-            </a:lvl7pPr>
-            <a:lvl8pPr marL="3200400" indent="0">
-              <a:buNone/>
-              <a:defRPr sz="900"/>
-            </a:lvl8pPr>
-            <a:lvl9pPr marL="3657600" indent="0">
-              <a:buNone/>
-              <a:defRPr sz="900"/>
-            </a:lvl9pPr>
-          </a:lstStyle>
-          <a:p>
-            <a:pPr lvl="0"/>
-            <a:r>
-              <a:rPr lang="en-US" smtClean="0"/>
-              <a:t>Click to edit Master text styles</a:t>
-            </a:r>
-          </a:p>
-        </p:txBody>
-      </p:sp>
-      <p:sp>
-        <p:nvSpPr>
-          <p:cNvPr id="5" name="Date Placeholder 4"/>
-          <p:cNvSpPr>
-            <a:spLocks noGrp="1"/>
-          </p:cNvSpPr>
-          <p:nvPr>
-            <p:ph type="dt" sz="half" idx="10"/>
-          </p:nvPr>
-        </p:nvSpPr>
-        <p:spPr/>
-        <p:txBody>
-          <a:bodyPr/>
-          <a:lstStyle/>
-          <a:p>
-            <a:fld id="{5BCAD085-E8A6-8845-BD4E-CB4CCA059FC4}" type="datetimeFigureOut">
-              <a:rPr lang="en-US" smtClean="0"/>
-              <a:t>1/27/13</a:t>
-            </a:fld>
-            <a:endParaRPr lang="en-US"/>
-          </a:p>
-        </p:txBody>
-      </p:sp>
-      <p:sp>
-        <p:nvSpPr>
-          <p:cNvPr id="6" name="Footer Placeholder 5"/>
-          <p:cNvSpPr>
-            <a:spLocks noGrp="1"/>
-          </p:cNvSpPr>
-          <p:nvPr>
-            <p:ph type="ftr" sz="quarter" idx="11"/>
-          </p:nvPr>
-        </p:nvSpPr>
-        <p:spPr/>
-        <p:txBody>
-          <a:bodyPr/>
-          <a:lstStyle/>
-          <a:p>
-            <a:endParaRPr lang="en-US"/>
-          </a:p>
-        </p:txBody>
-      </p:sp>
-      <p:sp>
-        <p:nvSpPr>
-          <p:cNvPr id="7" name="Slide Number Placeholder 6"/>
-          <p:cNvSpPr>
-            <a:spLocks noGrp="1"/>
-          </p:cNvSpPr>
-          <p:nvPr>
-            <p:ph type="sldNum" sz="quarter" idx="12"/>
-          </p:nvPr>
-        </p:nvSpPr>
-        <p:spPr/>
-        <p:txBody>
-          <a:bodyPr/>
-          <a:lstStyle/>
-          <a:p>
-            <a:fld id="{C1FF6DA9-008F-8B48-92A6-B652298478BF}" type="slidenum">
-              <a:rPr lang="en-US" smtClean="0"/>
-              <a:t>‹#›</a:t>
-            </a:fld>
-            <a:endParaRPr lang="en-US"/>
-          </a:p>
-        </p:txBody>
-      </p:sp>
-    </p:spTree>
-    <p:extLst>
-      <p:ext uri="{BB962C8B-B14F-4D97-AF65-F5344CB8AC3E}">
-        <p14:creationId xmlns:p14="http://schemas.microsoft.com/office/powerpoint/2010/main" val="1840726560"/>
-      </p:ext>
-    </p:extLst>
-  </p:cSld>
-  <p:clrMapOvr>
-    <a:masterClrMapping/>
-  </p:clrMapOvr>
-</p:sldLayout>
-</file>
-
-<file path=ppt/slideLayouts/slideLayout9.xml><?xml version="1.0" encoding="utf-8"?>
-<p:sldLayout xmlns:a="http://schemas.openxmlformats.org/drawingml/2006/main" xmlns:r="http://schemas.openxmlformats.org/officeDocument/2006/relationships" xmlns:p="http://schemas.openxmlformats.org/presentationml/2006/main" type="picTx" preserve="1">
-  <p:cSld name="Picture with Caption">
-    <p:spTree>
-      <p:nvGrpSpPr>
-        <p:cNvPr id="1" name=""/>
-        <p:cNvGrpSpPr/>
-        <p:nvPr/>
-      </p:nvGrpSpPr>
-      <p:grpSpPr>
-        <a:xfrm>
-          <a:off x="0" y="0"/>
-          <a:ext cx="0" cy="0"/>
-          <a:chOff x="0" y="0"/>
-          <a:chExt cx="0" cy="0"/>
-        </a:xfrm>
-      </p:grpSpPr>
-      <p:sp>
-        <p:nvSpPr>
-          <p:cNvPr id="2" name="Title 1"/>
-          <p:cNvSpPr>
-            <a:spLocks noGrp="1"/>
-          </p:cNvSpPr>
-          <p:nvPr>
-            <p:ph type="title"/>
-          </p:nvPr>
-        </p:nvSpPr>
-        <p:spPr>
-          <a:xfrm>
-            <a:off x="1792288" y="4800600"/>
-            <a:ext cx="5486400" cy="566738"/>
-          </a:xfrm>
-        </p:spPr>
-        <p:txBody>
-          <a:bodyPr anchor="b"/>
-          <a:lstStyle>
-            <a:lvl1pPr algn="l">
-              <a:defRPr sz="2000" b="1"/>
-            </a:lvl1pPr>
-          </a:lstStyle>
-          <a:p>
-            <a:r>
-              <a:rPr lang="en-US" smtClean="0"/>
-              <a:t>Click to edit Master title style</a:t>
-            </a:r>
-            <a:endParaRPr lang="en-US"/>
-          </a:p>
-        </p:txBody>
-      </p:sp>
-      <p:sp>
-        <p:nvSpPr>
-          <p:cNvPr id="3" name="Picture Placeholder 2"/>
-          <p:cNvSpPr>
-            <a:spLocks noGrp="1"/>
-          </p:cNvSpPr>
-          <p:nvPr>
-            <p:ph type="pic" idx="1"/>
-          </p:nvPr>
-        </p:nvSpPr>
-        <p:spPr>
-          <a:xfrm>
-            <a:off x="1792288" y="612775"/>
-            <a:ext cx="5486400" cy="4114800"/>
-          </a:xfrm>
-        </p:spPr>
-        <p:txBody>
-          <a:bodyPr/>
-          <a:lstStyle>
-            <a:lvl1pPr marL="0" indent="0">
-              <a:buNone/>
-              <a:defRPr sz="3200"/>
-            </a:lvl1pPr>
-            <a:lvl2pPr marL="457200" indent="0">
-              <a:buNone/>
-              <a:defRPr sz="2800"/>
-            </a:lvl2pPr>
-            <a:lvl3pPr marL="914400" indent="0">
-              <a:buNone/>
-              <a:defRPr sz="2400"/>
-            </a:lvl3pPr>
-            <a:lvl4pPr marL="1371600" indent="0">
-              <a:buNone/>
-              <a:defRPr sz="2000"/>
-            </a:lvl4pPr>
-            <a:lvl5pPr marL="1828800" indent="0">
-              <a:buNone/>
-              <a:defRPr sz="2000"/>
-            </a:lvl5pPr>
-            <a:lvl6pPr marL="2286000" indent="0">
-              <a:buNone/>
-              <a:defRPr sz="2000"/>
-            </a:lvl6pPr>
-            <a:lvl7pPr marL="2743200" indent="0">
-              <a:buNone/>
-              <a:defRPr sz="2000"/>
-            </a:lvl7pPr>
-            <a:lvl8pPr marL="3200400" indent="0">
-              <a:buNone/>
-              <a:defRPr sz="2000"/>
-            </a:lvl8pPr>
-            <a:lvl9pPr marL="3657600" indent="0">
-              <a:buNone/>
-              <a:defRPr sz="2000"/>
-            </a:lvl9pPr>
-          </a:lstStyle>
-          <a:p>
-            <a:endParaRPr lang="en-US"/>
-          </a:p>
-        </p:txBody>
-      </p:sp>
-      <p:sp>
-        <p:nvSpPr>
-          <p:cNvPr id="4" name="Text Placeholder 3"/>
-          <p:cNvSpPr>
-            <a:spLocks noGrp="1"/>
-          </p:cNvSpPr>
-          <p:nvPr>
-            <p:ph type="body" sz="half" idx="2"/>
-          </p:nvPr>
-        </p:nvSpPr>
-        <p:spPr>
-          <a:xfrm>
-            <a:off x="1792288" y="5367338"/>
-            <a:ext cx="5486400" cy="804862"/>
-          </a:xfrm>
-        </p:spPr>
-        <p:txBody>
-          <a:bodyPr/>
-          <a:lstStyle>
-            <a:lvl1pPr marL="0" indent="0">
-              <a:buNone/>
-              <a:defRPr sz="1400"/>
-            </a:lvl1pPr>
-            <a:lvl2pPr marL="457200" indent="0">
-              <a:buNone/>
-              <a:defRPr sz="1200"/>
-            </a:lvl2pPr>
-            <a:lvl3pPr marL="914400" indent="0">
-              <a:buNone/>
-              <a:defRPr sz="1000"/>
-            </a:lvl3pPr>
-            <a:lvl4pPr marL="1371600" indent="0">
-              <a:buNone/>
-              <a:defRPr sz="900"/>
-            </a:lvl4pPr>
-            <a:lvl5pPr marL="1828800" indent="0">
-              <a:buNone/>
-              <a:defRPr sz="900"/>
-            </a:lvl5pPr>
-            <a:lvl6pPr marL="2286000" indent="0">
-              <a:buNone/>
-              <a:defRPr sz="900"/>
-            </a:lvl6pPr>
-            <a:lvl7pPr marL="2743200" indent="0">
-              <a:buNone/>
-              <a:defRPr sz="900"/>
-            </a:lvl7pPr>
-            <a:lvl8pPr marL="3200400" indent="0">
-              <a:buNone/>
-              <a:defRPr sz="900"/>
-            </a:lvl8pPr>
-            <a:lvl9pPr marL="3657600" indent="0">
-              <a:buNone/>
-              <a:defRPr sz="900"/>
-            </a:lvl9pPr>
-          </a:lstStyle>
-          <a:p>
-            <a:pPr lvl="0"/>
-            <a:r>
-              <a:rPr lang="en-US" smtClean="0"/>
-              <a:t>Click to edit Master text styles</a:t>
-            </a:r>
-          </a:p>
-        </p:txBody>
-      </p:sp>
-      <p:sp>
-        <p:nvSpPr>
-          <p:cNvPr id="5" name="Date Placeholder 4"/>
-          <p:cNvSpPr>
-            <a:spLocks noGrp="1"/>
-          </p:cNvSpPr>
-          <p:nvPr>
-            <p:ph type="dt" sz="half" idx="10"/>
-          </p:nvPr>
-        </p:nvSpPr>
-        <p:spPr/>
-        <p:txBody>
-          <a:bodyPr/>
-          <a:lstStyle/>
-          <a:p>
-            <a:fld id="{5BCAD085-E8A6-8845-BD4E-CB4CCA059FC4}" type="datetimeFigureOut">
-              <a:rPr lang="en-US" smtClean="0"/>
-              <a:t>1/27/13</a:t>
-            </a:fld>
-            <a:endParaRPr lang="en-US"/>
-          </a:p>
-        </p:txBody>
-      </p:sp>
-      <p:sp>
-        <p:nvSpPr>
-          <p:cNvPr id="6" name="Footer Placeholder 5"/>
-          <p:cNvSpPr>
-            <a:spLocks noGrp="1"/>
-          </p:cNvSpPr>
-          <p:nvPr>
-            <p:ph type="ftr" sz="quarter" idx="11"/>
-          </p:nvPr>
-        </p:nvSpPr>
-        <p:spPr/>
-        <p:txBody>
-          <a:bodyPr/>
-          <a:lstStyle/>
-          <a:p>
-            <a:endParaRPr lang="en-US"/>
-          </a:p>
-        </p:txBody>
-      </p:sp>
-      <p:sp>
-        <p:nvSpPr>
-          <p:cNvPr id="7" name="Slide Number Placeholder 6"/>
-          <p:cNvSpPr>
-            <a:spLocks noGrp="1"/>
-          </p:cNvSpPr>
-          <p:nvPr>
-            <p:ph type="sldNum" sz="quarter" idx="12"/>
-          </p:nvPr>
-        </p:nvSpPr>
-        <p:spPr/>
-        <p:txBody>
-          <a:bodyPr/>
-          <a:lstStyle/>
-          <a:p>
-            <a:fld id="{C1FF6DA9-008F-8B48-92A6-B652298478BF}" type="slidenum">
-              <a:rPr lang="en-US" smtClean="0"/>
-              <a:t>‹#›</a:t>
-            </a:fld>
-            <a:endParaRPr lang="en-US"/>
-          </a:p>
-        </p:txBody>
-      </p:sp>
-    </p:spTree>
-    <p:extLst>
-      <p:ext uri="{BB962C8B-B14F-4D97-AF65-F5344CB8AC3E}">
-        <p14:creationId xmlns:p14="http://schemas.microsoft.com/office/powerpoint/2010/main" val="3889236939"/>
       </p:ext>
     </p:extLst>
   </p:cSld>
@@ -2599,8 +1350,8 @@
         </p:nvSpPr>
         <p:spPr>
           <a:xfrm>
-            <a:off x="609584" y="274638"/>
-            <a:ext cx="10972525" cy="1143000"/>
+            <a:off x="838200" y="365125"/>
+            <a:ext cx="10515600" cy="1325563"/>
           </a:xfrm>
           <a:prstGeom prst="rect">
             <a:avLst/>
@@ -2632,8 +1383,8 @@
         </p:nvSpPr>
         <p:spPr>
           <a:xfrm>
-            <a:off x="609584" y="1600200"/>
-            <a:ext cx="10972525" cy="4525963"/>
+            <a:off x="838200" y="1825625"/>
+            <a:ext cx="10515600" cy="4351338"/>
           </a:xfrm>
           <a:prstGeom prst="rect">
             <a:avLst/>
@@ -2694,8 +1445,8 @@
         </p:nvSpPr>
         <p:spPr>
           <a:xfrm>
-            <a:off x="609584" y="6356350"/>
-            <a:ext cx="2844728" cy="365125"/>
+            <a:off x="838200" y="6356350"/>
+            <a:ext cx="2743200" cy="365125"/>
           </a:xfrm>
           <a:prstGeom prst="rect">
             <a:avLst/>
@@ -2735,8 +1486,8 @@
         </p:nvSpPr>
         <p:spPr>
           <a:xfrm>
-            <a:off x="4165495" y="6356350"/>
-            <a:ext cx="3860703" cy="365125"/>
+            <a:off x="4038600" y="6356350"/>
+            <a:ext cx="4114800" cy="365125"/>
           </a:xfrm>
           <a:prstGeom prst="rect">
             <a:avLst/>
@@ -2772,8 +1523,8 @@
         </p:nvSpPr>
         <p:spPr>
           <a:xfrm>
-            <a:off x="8737381" y="6356350"/>
-            <a:ext cx="2844728" cy="365125"/>
+            <a:off x="8610600" y="6356350"/>
+            <a:ext cx="2743200" cy="365125"/>
           </a:xfrm>
           <a:prstGeom prst="rect">
             <a:avLst/>
@@ -2814,13 +1565,8 @@
     <p:sldLayoutId id="2147483650" r:id="rId2"/>
     <p:sldLayoutId id="2147483651" r:id="rId3"/>
     <p:sldLayoutId id="2147483652" r:id="rId4"/>
-    <p:sldLayoutId id="2147483653" r:id="rId5"/>
     <p:sldLayoutId id="2147483654" r:id="rId6"/>
     <p:sldLayoutId id="2147483655" r:id="rId7"/>
-    <p:sldLayoutId id="2147483656" r:id="rId8"/>
-    <p:sldLayoutId id="2147483657" r:id="rId9"/>
-    <p:sldLayoutId id="2147483658" r:id="rId10"/>
-    <p:sldLayoutId id="2147483659" r:id="rId11"/>
   </p:sldLayoutIdLst>
   <p:txStyles>
     <p:titleStyle>
